--- a/public/manual.pptx
+++ b/public/manual.pptx
@@ -13372,7 +13372,7 @@
                 <a:latin typeface="Yu Gothic"/>
                 <a:ea typeface="Yu Gothic"/>
               </a:rPr>
-              <a:t>夜の十一時を過ぎた頃、玄関のチャイムが鳴りました。こんな時間に誰だろう。胸の奥がざわつきました。ドアを開けると、しばらく施設で暮らしていたはずの息子が立っていました。少し痩せて、うつむいて、けれど確かに、我が子の顔でした。</a:t>
+              <a:t>夜の十一時を過ぎた頃でした。もう休もうとしていたその時、玄関のチャイムが鳴りました。こんな時間に誰だろう。胸の奥がざわつきました。心のどこかで、来る人の見当はついていたのかもしれません。</a:t>
             </a:r>
           </a:p>
           <a:p>
@@ -13388,6 +13388,29 @@
               </a:spcAft>
             </a:pPr>
             <a:r>
+              <a:rPr sz="1050" b="0" i="0">
+                <a:solidFill>
+                  <a:srgbClr val="242C3A"/>
+                </a:solidFill>
+                <a:latin typeface="Yu Gothic"/>
+                <a:ea typeface="Yu Gothic"/>
+              </a:rPr>
+              <a:t>ドアを開けると、しばらく施設で暮らしていたはずの息子が立っていました。少し痩せて、うつむいて、けれど確かに、我が子の顔でした。</a:t>
+            </a:r>
+          </a:p>
+          <a:p>
+            <a:pPr>
+              <a:lnSpc>
+                <a:spcPct val="116000"/>
+              </a:lnSpc>
+              <a:spcBef>
+                <a:spcPts val="0"/>
+              </a:spcBef>
+              <a:spcAft>
+                <a:spcPts val="500"/>
+              </a:spcAft>
+            </a:pPr>
+            <a:r>
               <a:rPr sz="1050" b="1" i="0">
                 <a:solidFill>
                   <a:srgbClr val="1B3358"/>
@@ -13418,7 +13441,7 @@
                 <a:latin typeface="Yu Gothic"/>
                 <a:ea typeface="Yu Gothic"/>
               </a:rPr>
-              <a:t>声は震えていました。ダルクを自分から出てきてしまったこと、約束を守れなかったこと。頭では分かっていても、目の前にいるのは、大切な我が子でした。</a:t>
+              <a:t>声は震えていました。玄関の灯りの下で見るその姿に、胸が締めつけられました。ダルクを自分から出てきてしまったこと、約束を守れなかったこと。頭では分かっていました。それでも、目の前にいるのは、大切な我が子でした。</a:t>
             </a:r>
           </a:p>
           <a:p>
@@ -13441,7 +13464,7 @@
                 <a:latin typeface="Yu Gothic"/>
                 <a:ea typeface="Yu Gothic"/>
               </a:rPr>
-              <a:t>「お腹すいた」と言われれば、温かいご飯を出してあげたくなります。疲れた顔を見れば、今夜くらいは布団で眠らせてあげたくなります。それは、親として当たり前の、愛情そのものです。</a:t>
+              <a:t>「お腹すいた」と言われれば、温かいご飯を出してあげたくなります。汚れた服を見れば、お風呂に入れてあげたくなります。疲れた顔を見れば、今夜くらいは布団で眠らせてあげたくなります。それは、親として当たり前の気持ちです。愛情そのものです。</a:t>
             </a:r>
           </a:p>
           <a:p>
@@ -13464,7 +13487,30 @@
                 <a:latin typeface="Yu Gothic"/>
                 <a:ea typeface="Yu Gothic"/>
               </a:rPr>
-              <a:t>けれど、心の隅で別の声も聞こえていました。「ここで家に入れて、本当にこの子のためになるのだろうか」。以前も、こうして戻ってきては、また同じことを繰り返してきた——。入れてあげたい気持ちと、入れてはいけないという思いのあいだで、あなたは玄関先に立ち尽くしました。</a:t>
+              <a:t>けれど、心の隅で、別の声も聞こえていました。「ここで家に入れてしまって、本当にこの子のためになるのだろうか」。以前も、こうして戻ってきては、また同じことを繰り返してきたことを、あなたは知っているからです。</a:t>
+            </a:r>
+          </a:p>
+          <a:p>
+            <a:pPr>
+              <a:lnSpc>
+                <a:spcPct val="116000"/>
+              </a:lnSpc>
+              <a:spcBef>
+                <a:spcPts val="0"/>
+              </a:spcBef>
+              <a:spcAft>
+                <a:spcPts val="500"/>
+              </a:spcAft>
+            </a:pPr>
+            <a:r>
+              <a:rPr sz="1050" b="0" i="0">
+                <a:solidFill>
+                  <a:srgbClr val="242C3A"/>
+                </a:solidFill>
+                <a:latin typeface="Yu Gothic"/>
+                <a:ea typeface="Yu Gothic"/>
+              </a:rPr>
+              <a:t>入れてあげたい気持ちと、入れてはいけないという思い。そのあいだで、あなたは玄関先に立ち尽くしました。どちらを選んでも、胸が痛む。これほど苦しい選択が、この世にあるでしょうか。</a:t>
             </a:r>
           </a:p>
           <a:p>
